--- a/test/E2_Query_Flow.pptx
+++ b/test/E2_Query_Flow.pptx
@@ -4362,8 +4362,9 @@
                   <a:srgbClr val="175CA6"/>
                 </a:solidFill>
               </a:rPr>
-              <a:t>prompt +
-full history</a:t>
+              <a:t>SYSTEM_PROMPT
++ snapshot
++ history</a:t>
             </a:r>
           </a:p>
         </p:txBody>
@@ -4993,7 +4994,7 @@
                   <a:srgbClr val="444444"/>
                 </a:solidFill>
               </a:rPr>
-              <a:t>HTTP POST {session, message} to Orchestrator /chat</a:t>
+              <a:t>HTTP POST {session_id, message} → Orchestrator /chat  (pure stdlib urllib; --session flag for named sessions)</a:t>
             </a:r>
           </a:p>
         </p:txBody>
@@ -5185,7 +5186,7 @@
                   <a:srgbClr val="444444"/>
                 </a:solidFill>
               </a:rPr>
-              <a:t>Injects conversation history including move_cell + alert context</a:t>
+              <a:t>Calls build_network_context() → GET /network on Controller; appends live cell snapshot to SYSTEM_PROMPT</a:t>
             </a:r>
           </a:p>
         </p:txBody>
@@ -5284,7 +5285,7 @@
             <a:avLst/>
           </a:prstGeom>
           <a:solidFill>
-            <a:srgbClr val="5A238C"/>
+            <a:srgbClr val="0A2955"/>
           </a:solidFill>
           <a:ln w="3810">
             <a:solidFill>
@@ -5343,7 +5344,7 @@
                   <a:srgbClr val="FFFFFF"/>
                 </a:solidFill>
               </a:rPr>
-              <a:t>Gemini LLM</a:t>
+              <a:t>Orchestrator</a:t>
             </a:r>
           </a:p>
         </p:txBody>
@@ -5377,7 +5378,7 @@
                   <a:srgbClr val="444444"/>
                 </a:solidFill>
               </a:rPr>
-              <a:t>No tool call — reconstructs decision from context</a:t>
+              <a:t>Sends SYSTEM_PROMPT (static) + live snapshot (dynamic) + session history (types.Content) to Gemini</a:t>
             </a:r>
           </a:p>
         </p:txBody>
@@ -5569,7 +5570,7 @@
                   <a:srgbClr val="444444"/>
                 </a:solidFill>
               </a:rPr>
-              <a:t>Identifies: which cell, source DU, target DU, triggering alert</a:t>
+              <a:t>No tool call — reconstructs decision from move_cell record in session history (types.Content list)</a:t>
             </a:r>
           </a:p>
         </p:txBody>
@@ -5761,7 +5762,7 @@
                   <a:srgbClr val="444444"/>
                 </a:solidFill>
               </a:rPr>
-              <a:t>Recalls DU load comparison at time of decision</a:t>
+              <a:t>Identifies: which cell, source DU, target DU, triggering alert</a:t>
             </a:r>
           </a:p>
         </p:txBody>
@@ -5953,7 +5954,7 @@
                   <a:srgbClr val="444444"/>
                 </a:solidFill>
               </a:rPr>
-              <a:t>Generates causal explanation: overload alert → DU ranking → move</a:t>
+              <a:t>Recalls DU load comparison at time of decision</a:t>
             </a:r>
           </a:p>
         </p:txBody>
@@ -6052,7 +6053,7 @@
             <a:avLst/>
           </a:prstGeom>
           <a:solidFill>
-            <a:srgbClr val="0A2955"/>
+            <a:srgbClr val="5A238C"/>
           </a:solidFill>
           <a:ln w="3810">
             <a:solidFill>
@@ -6111,7 +6112,7 @@
                   <a:srgbClr val="FFFFFF"/>
                 </a:solidFill>
               </a:rPr>
-              <a:t>Orchestrator</a:t>
+              <a:t>Gemini LLM</a:t>
             </a:r>
           </a:p>
         </p:txBody>
@@ -6145,7 +6146,7 @@
                   <a:srgbClr val="444444"/>
                 </a:solidFill>
               </a:rPr>
-              <a:t>Returns HTTP response {reply} to chat.py</a:t>
+              <a:t>Generates causal explanation: overload alert → DU ranking → move; loop exits</a:t>
             </a:r>
           </a:p>
         </p:txBody>
@@ -6244,6 +6245,198 @@
             <a:avLst/>
           </a:prstGeom>
           <a:solidFill>
+            <a:srgbClr val="0A2955"/>
+          </a:solidFill>
+          <a:ln w="3810">
+            <a:solidFill>
+              <a:srgbClr val="AAAAAA"/>
+            </a:solidFill>
+          </a:ln>
+        </p:spPr>
+        <p:style>
+          <a:lnRef idx="1">
+            <a:schemeClr val="accent1"/>
+          </a:lnRef>
+          <a:fillRef idx="3">
+            <a:schemeClr val="accent1"/>
+          </a:fillRef>
+          <a:effectRef idx="2">
+            <a:schemeClr val="accent1"/>
+          </a:effectRef>
+          <a:fontRef idx="minor">
+            <a:schemeClr val="lt1"/>
+          </a:fontRef>
+        </p:style>
+        <p:txBody>
+          <a:bodyPr rtlCol="0" anchor="ctr"/>
+          <a:lstStyle/>
+          <a:p>
+            <a:pPr algn="ctr"/>
+          </a:p>
+        </p:txBody>
+      </p:sp>
+      <p:sp>
+        <p:nvSpPr>
+          <p:cNvPr id="48" name="TextBox 47"/>
+          <p:cNvSpPr txBox="1"/>
+          <p:nvPr/>
+        </p:nvSpPr>
+        <p:spPr>
+          <a:xfrm>
+            <a:off x="868680" y="4197096"/>
+            <a:ext cx="1463040" cy="274320"/>
+          </a:xfrm>
+          <a:prstGeom prst="rect">
+            <a:avLst/>
+          </a:prstGeom>
+          <a:noFill/>
+        </p:spPr>
+        <p:txBody>
+          <a:bodyPr wrap="square">
+            <a:spAutoFit/>
+          </a:bodyPr>
+          <a:lstStyle/>
+          <a:p>
+            <a:pPr algn="ctr"/>
+            <a:r>
+              <a:rPr sz="900" b="1" i="0">
+                <a:solidFill>
+                  <a:srgbClr val="FFFFFF"/>
+                </a:solidFill>
+              </a:rPr>
+              <a:t>Orchestrator</a:t>
+            </a:r>
+          </a:p>
+        </p:txBody>
+      </p:sp>
+      <p:sp>
+        <p:nvSpPr>
+          <p:cNvPr id="49" name="TextBox 48"/>
+          <p:cNvSpPr txBox="1"/>
+          <p:nvPr/>
+        </p:nvSpPr>
+        <p:spPr>
+          <a:xfrm>
+            <a:off x="2423160" y="4169663"/>
+            <a:ext cx="9418320" cy="329184"/>
+          </a:xfrm>
+          <a:prstGeom prst="rect">
+            <a:avLst/>
+          </a:prstGeom>
+          <a:noFill/>
+        </p:spPr>
+        <p:txBody>
+          <a:bodyPr wrap="square">
+            <a:spAutoFit/>
+          </a:bodyPr>
+          <a:lstStyle/>
+          <a:p>
+            <a:pPr algn="l"/>
+            <a:r>
+              <a:rPr sz="1000" b="0" i="0">
+                <a:solidFill>
+                  <a:srgbClr val="444444"/>
+                </a:solidFill>
+              </a:rPr>
+              <a:t>Streams text/plain chunks via sync generator (Starlette thread pool → StreamingResponse)</a:t>
+            </a:r>
+          </a:p>
+        </p:txBody>
+      </p:sp>
+      <p:sp>
+        <p:nvSpPr>
+          <p:cNvPr id="50" name="Rectangle 49"/>
+          <p:cNvSpPr/>
+          <p:nvPr/>
+        </p:nvSpPr>
+        <p:spPr>
+          <a:xfrm>
+            <a:off x="274320" y="4535424"/>
+            <a:ext cx="11612880" cy="402336"/>
+          </a:xfrm>
+          <a:prstGeom prst="rect">
+            <a:avLst/>
+          </a:prstGeom>
+          <a:solidFill>
+            <a:srgbClr val="E8ECF2"/>
+          </a:solidFill>
+          <a:ln w="3810">
+            <a:solidFill>
+              <a:srgbClr val="CCCCCC"/>
+            </a:solidFill>
+          </a:ln>
+        </p:spPr>
+        <p:style>
+          <a:lnRef idx="1">
+            <a:schemeClr val="accent1"/>
+          </a:lnRef>
+          <a:fillRef idx="3">
+            <a:schemeClr val="accent1"/>
+          </a:fillRef>
+          <a:effectRef idx="2">
+            <a:schemeClr val="accent1"/>
+          </a:effectRef>
+          <a:fontRef idx="minor">
+            <a:schemeClr val="lt1"/>
+          </a:fontRef>
+        </p:style>
+        <p:txBody>
+          <a:bodyPr rtlCol="0" anchor="ctr"/>
+          <a:lstStyle/>
+          <a:p>
+            <a:pPr algn="ctr"/>
+          </a:p>
+        </p:txBody>
+      </p:sp>
+      <p:sp>
+        <p:nvSpPr>
+          <p:cNvPr id="51" name="TextBox 50"/>
+          <p:cNvSpPr txBox="1"/>
+          <p:nvPr/>
+        </p:nvSpPr>
+        <p:spPr>
+          <a:xfrm>
+            <a:off x="320040" y="4572000"/>
+            <a:ext cx="502920" cy="329184"/>
+          </a:xfrm>
+          <a:prstGeom prst="rect">
+            <a:avLst/>
+          </a:prstGeom>
+          <a:noFill/>
+        </p:spPr>
+        <p:txBody>
+          <a:bodyPr wrap="square">
+            <a:spAutoFit/>
+          </a:bodyPr>
+          <a:lstStyle/>
+          <a:p>
+            <a:pPr algn="ctr"/>
+            <a:r>
+              <a:rPr sz="1100" b="1" i="0">
+                <a:solidFill>
+                  <a:srgbClr val="0A2955"/>
+                </a:solidFill>
+              </a:rPr>
+              <a:t>10</a:t>
+            </a:r>
+          </a:p>
+        </p:txBody>
+      </p:sp>
+      <p:sp>
+        <p:nvSpPr>
+          <p:cNvPr id="52" name="Rectangle 51"/>
+          <p:cNvSpPr/>
+          <p:nvPr/>
+        </p:nvSpPr>
+        <p:spPr>
+          <a:xfrm>
+            <a:off x="868680" y="4599432"/>
+            <a:ext cx="1463040" cy="274320"/>
+          </a:xfrm>
+          <a:prstGeom prst="rect">
+            <a:avLst/>
+          </a:prstGeom>
+          <a:solidFill>
             <a:srgbClr val="175CA6"/>
           </a:solidFill>
           <a:ln w="3810">
@@ -6276,13 +6469,13 @@
       </p:sp>
       <p:sp>
         <p:nvSpPr>
-          <p:cNvPr id="48" name="TextBox 47"/>
+          <p:cNvPr id="53" name="TextBox 52"/>
           <p:cNvSpPr txBox="1"/>
           <p:nvPr/>
         </p:nvSpPr>
         <p:spPr>
           <a:xfrm>
-            <a:off x="868680" y="4197096"/>
+            <a:off x="868680" y="4599432"/>
             <a:ext cx="1463040" cy="274320"/>
           </a:xfrm>
           <a:prstGeom prst="rect">
@@ -6310,13 +6503,13 @@
       </p:sp>
       <p:sp>
         <p:nvSpPr>
-          <p:cNvPr id="49" name="TextBox 48"/>
+          <p:cNvPr id="54" name="TextBox 53"/>
           <p:cNvSpPr txBox="1"/>
           <p:nvPr/>
         </p:nvSpPr>
         <p:spPr>
           <a:xfrm>
-            <a:off x="2423160" y="4169663"/>
+            <a:off x="2423160" y="4572000"/>
             <a:ext cx="9418320" cy="329184"/>
           </a:xfrm>
           <a:prstGeom prst="rect">
@@ -6337,7 +6530,7 @@
                   <a:srgbClr val="444444"/>
                 </a:solidFill>
               </a:rPr>
-              <a:t>Prints explanation to user</a:t>
+              <a:t>Prints streamed explanation to operator terminal</a:t>
             </a:r>
           </a:p>
         </p:txBody>
